--- a/assets/pptx/catalog-458.pptx
+++ b/assets/pptx/catalog-458.pptx
@@ -3369,7 +3369,7 @@
                 <a:ea typeface="Ebrima"/>
                 <a:cs typeface="Ebrima"/>
               </a:rPr>
-              <a:t>ይኸው ምስጋናዬ ለአንተ (2x)</a:t>
+              <a:t>ይኸው ምስጋናዬ ለአንተ 2x</a:t>
             </a:r>
           </a:p>
           <a:p>
@@ -3387,7 +3387,7 @@
                 <a:ea typeface="Ebrima"/>
                 <a:cs typeface="Ebrima"/>
               </a:rPr>
-              <a:t>ይኸው አምልኮዬ ለአንተ (2x)</a:t>
+              <a:t>ይኸው አምልኮዬ ለአንተ 2x</a:t>
             </a:r>
           </a:p>
           <a:p>
@@ -3405,7 +3405,7 @@
                 <a:ea typeface="Ebrima"/>
                 <a:cs typeface="Ebrima"/>
               </a:rPr>
-              <a:t>ይኸው ዝማሬዬ ለአንተ (2x)</a:t>
+              <a:t>ይኸው ዝማሬዬ ለአንተ 2x</a:t>
             </a:r>
           </a:p>
           <a:p>
@@ -3423,7 +3423,7 @@
                 <a:ea typeface="Ebrima"/>
                 <a:cs typeface="Ebrima"/>
               </a:rPr>
-              <a:t>ይኸው ሙገሳዬ ለአንተ (2x)</a:t>
+              <a:t>ይኸው ሙገሳዬ ለአንተ 2x</a:t>
             </a:r>
           </a:p>
         </p:txBody>
@@ -3817,7 +3817,7 @@
                 <a:ea typeface="Ebrima"/>
                 <a:cs typeface="Ebrima"/>
               </a:rPr>
-              <a:t>ይኸው ሽብሸባዬ ለአንተ (2x)</a:t>
+              <a:t>ይኸው ሽብሸባዬ ለአንተ 2x</a:t>
             </a:r>
           </a:p>
           <a:p>
@@ -3835,7 +3835,7 @@
                 <a:ea typeface="Ebrima"/>
                 <a:cs typeface="Ebrima"/>
               </a:rPr>
-              <a:t>ይኸው ጭብጨባዬ ለአንተ (2x)</a:t>
+              <a:t>ይኸው ጭብጨባዬ ለአንተ 2x</a:t>
             </a:r>
           </a:p>
           <a:p>
@@ -3853,7 +3853,7 @@
                 <a:ea typeface="Ebrima"/>
                 <a:cs typeface="Ebrima"/>
               </a:rPr>
-              <a:t>ይኸው እልልታዬ ለአንተ (2x)</a:t>
+              <a:t>ይኸው እልልታዬ ለአንተ 2x</a:t>
             </a:r>
           </a:p>
           <a:p>
@@ -3871,7 +3871,7 @@
                 <a:ea typeface="Ebrima"/>
                 <a:cs typeface="Ebrima"/>
               </a:rPr>
-              <a:t>ይኸው ጭፈራዬ ለአንተ (2x)</a:t>
+              <a:t>ይኸው ጭፈራዬ ለአንተ 2x</a:t>
             </a:r>
           </a:p>
         </p:txBody>
@@ -3938,7 +3938,7 @@
                 <a:ea typeface="Ebrima"/>
                 <a:cs typeface="Ebrima"/>
               </a:rPr>
-              <a:t>ይኸው ውዳሴዬ ለአንተ (2x)</a:t>
+              <a:t>ይኸው ውዳሴዬ ለአንተ 2x</a:t>
             </a:r>
           </a:p>
           <a:p>
@@ -3956,7 +3956,7 @@
                 <a:ea typeface="Ebrima"/>
                 <a:cs typeface="Ebrima"/>
               </a:rPr>
-              <a:t>ይኸው አክብሮቴ ለአንተ (2x)</a:t>
+              <a:t>ይኸው አክብሮቴ ለአንተ 2x</a:t>
             </a:r>
           </a:p>
           <a:p>
@@ -3974,7 +3974,7 @@
                 <a:ea typeface="Ebrima"/>
                 <a:cs typeface="Ebrima"/>
               </a:rPr>
-              <a:t>ይኸው ስግደቴ ለአንተ (2x)</a:t>
+              <a:t>ይኸው ስግደቴ ለአንተ 2x</a:t>
             </a:r>
           </a:p>
           <a:p>
@@ -3992,7 +3992,7 @@
                 <a:ea typeface="Ebrima"/>
                 <a:cs typeface="Ebrima"/>
               </a:rPr>
-              <a:t>ይኸው መገዛቴ ለአንተ (2x)</a:t>
+              <a:t>ይኸው መገዛቴ ለአንተ 2x</a:t>
             </a:r>
           </a:p>
         </p:txBody>
